--- a/docs/Product-Variant-Block-Firefly-Redesigned-Worker-Advantage.pptx
+++ b/docs/Product-Variant-Block-Firefly-Redesigned-Worker-Advantage.pptx
@@ -5,20 +5,21 @@
     <p:sldMasterId id="2147483648" r:id="rId1"/>
   </p:sldMasterIdLst>
   <p:notesMasterIdLst>
-    <p:notesMasterId r:id="rId13"/>
+    <p:notesMasterId r:id="rId14"/>
   </p:notesMasterIdLst>
   <p:sldIdLst>
     <p:sldId id="256" r:id="rId2"/>
     <p:sldId id="257" r:id="rId3"/>
     <p:sldId id="258" r:id="rId4"/>
     <p:sldId id="266" r:id="rId5"/>
-    <p:sldId id="259" r:id="rId6"/>
-    <p:sldId id="260" r:id="rId7"/>
-    <p:sldId id="261" r:id="rId8"/>
-    <p:sldId id="262" r:id="rId9"/>
-    <p:sldId id="263" r:id="rId10"/>
-    <p:sldId id="264" r:id="rId11"/>
-    <p:sldId id="265" r:id="rId12"/>
+    <p:sldId id="267" r:id="rId6"/>
+    <p:sldId id="259" r:id="rId7"/>
+    <p:sldId id="260" r:id="rId8"/>
+    <p:sldId id="261" r:id="rId9"/>
+    <p:sldId id="262" r:id="rId10"/>
+    <p:sldId id="263" r:id="rId11"/>
+    <p:sldId id="264" r:id="rId12"/>
+    <p:sldId id="265" r:id="rId13"/>
   </p:sldIdLst>
   <p:sldSz cx="12192000" cy="6858000"/>
   <p:notesSz cx="6858000" cy="12192000"/>
@@ -122,17 +123,25 @@
 </p:presentation>
 </file>
 
+<file path=ppt/revisionInfo.xml><?xml version="1.0" encoding="utf-8"?>
+<p1510:revInfo xmlns:a="http://schemas.openxmlformats.org/drawingml/2006/main" xmlns:r="http://schemas.openxmlformats.org/officeDocument/2006/relationships" xmlns:p1510="http://schemas.microsoft.com/office/powerpoint/2015/10/main">
+  <p1510:revLst>
+    <p1510:client id="{BAAA69F7-E821-0C41-AA98-889505C1569F}" v="1" dt="2026-08-20T07:29:18.256"/>
+  </p1510:revLst>
+</p1510:revInfo>
+</file>
+
 <file path=ppt/changesInfos/changesInfo1.xml><?xml version="1.0" encoding="utf-8"?>
 <pc:chgInfo xmlns:a="http://schemas.openxmlformats.org/drawingml/2006/main" xmlns:r="http://schemas.openxmlformats.org/officeDocument/2006/relationships" xmlns:ac="http://schemas.microsoft.com/office/drawing/2013/main/command" xmlns:pc="http://schemas.microsoft.com/office/powerpoint/2013/main/command">
   <pc:docChgLst>
     <pc:chgData name="Franck Sevin" userId="82d950c0-7bb5-4310-a4fc-a877d4bbe588" providerId="ADAL" clId="{EB9E244D-3F8B-59DF-801C-03BB392BC6F1}"/>
-    <pc:docChg chg="custSel modSld sldOrd">
-      <pc:chgData name="Franck Sevin" userId="82d950c0-7bb5-4310-a4fc-a877d4bbe588" providerId="ADAL" clId="{EB9E244D-3F8B-59DF-801C-03BB392BC6F1}" dt="2026-08-17T15:16:31.671" v="7" actId="14100"/>
+    <pc:docChg chg="custSel addSld modSld sldOrd">
+      <pc:chgData name="Franck Sevin" userId="82d950c0-7bb5-4310-a4fc-a877d4bbe588" providerId="ADAL" clId="{EB9E244D-3F8B-59DF-801C-03BB392BC6F1}" dt="2026-08-20T07:29:39.905" v="22" actId="1076"/>
       <pc:docMkLst>
         <pc:docMk/>
       </pc:docMkLst>
       <pc:sldChg chg="modSp mod">
-        <pc:chgData name="Franck Sevin" userId="82d950c0-7bb5-4310-a4fc-a877d4bbe588" providerId="ADAL" clId="{EB9E244D-3F8B-59DF-801C-03BB392BC6F1}" dt="2026-08-17T15:16:31.671" v="7" actId="14100"/>
+        <pc:chgData name="Franck Sevin" userId="82d950c0-7bb5-4310-a4fc-a877d4bbe588" providerId="ADAL" clId="{EB9E244D-3F8B-59DF-801C-03BB392BC6F1}" dt="2026-08-20T07:29:18.400" v="17" actId="27636"/>
         <pc:sldMkLst>
           <pc:docMk/>
           <pc:sldMk cId="0" sldId="256"/>
@@ -146,11 +155,27 @@
           </ac:spMkLst>
         </pc:spChg>
         <pc:spChg chg="mod">
+          <ac:chgData name="Franck Sevin" userId="82d950c0-7bb5-4310-a4fc-a877d4bbe588" providerId="ADAL" clId="{EB9E244D-3F8B-59DF-801C-03BB392BC6F1}" dt="2026-08-20T07:29:18.400" v="17" actId="27636"/>
+          <ac:spMkLst>
+            <pc:docMk/>
+            <pc:sldMk cId="0" sldId="256"/>
+            <ac:spMk id="5" creationId="{00000000-0000-0000-0000-000000000000}"/>
+          </ac:spMkLst>
+        </pc:spChg>
+        <pc:spChg chg="mod">
           <ac:chgData name="Franck Sevin" userId="82d950c0-7bb5-4310-a4fc-a877d4bbe588" providerId="ADAL" clId="{EB9E244D-3F8B-59DF-801C-03BB392BC6F1}" dt="2026-08-17T14:28:42.296" v="3" actId="27636"/>
           <ac:spMkLst>
             <pc:docMk/>
             <pc:sldMk cId="0" sldId="256"/>
             <ac:spMk id="6" creationId="{00000000-0000-0000-0000-000000000000}"/>
+          </ac:spMkLst>
+        </pc:spChg>
+        <pc:spChg chg="mod">
+          <ac:chgData name="Franck Sevin" userId="82d950c0-7bb5-4310-a4fc-a877d4bbe588" providerId="ADAL" clId="{EB9E244D-3F8B-59DF-801C-03BB392BC6F1}" dt="2026-08-20T07:29:18.399" v="16" actId="27636"/>
+          <ac:spMkLst>
+            <pc:docMk/>
+            <pc:sldMk cId="0" sldId="256"/>
+            <ac:spMk id="9" creationId="{00000000-0000-0000-0000-000000000000}"/>
           </ac:spMkLst>
         </pc:spChg>
         <pc:picChg chg="mod">
@@ -162,12 +187,149 @@
           </ac:picMkLst>
         </pc:picChg>
       </pc:sldChg>
+      <pc:sldChg chg="modSp mod">
+        <pc:chgData name="Franck Sevin" userId="82d950c0-7bb5-4310-a4fc-a877d4bbe588" providerId="ADAL" clId="{EB9E244D-3F8B-59DF-801C-03BB392BC6F1}" dt="2026-08-20T07:29:18.404" v="20" actId="27636"/>
+        <pc:sldMkLst>
+          <pc:docMk/>
+          <pc:sldMk cId="0" sldId="257"/>
+        </pc:sldMkLst>
+        <pc:spChg chg="mod">
+          <ac:chgData name="Franck Sevin" userId="82d950c0-7bb5-4310-a4fc-a877d4bbe588" providerId="ADAL" clId="{EB9E244D-3F8B-59DF-801C-03BB392BC6F1}" dt="2026-08-20T07:29:18.404" v="20" actId="27636"/>
+          <ac:spMkLst>
+            <pc:docMk/>
+            <pc:sldMk cId="0" sldId="257"/>
+            <ac:spMk id="14" creationId="{00000000-0000-0000-0000-000000000000}"/>
+          </ac:spMkLst>
+        </pc:spChg>
+        <pc:spChg chg="mod">
+          <ac:chgData name="Franck Sevin" userId="82d950c0-7bb5-4310-a4fc-a877d4bbe588" providerId="ADAL" clId="{EB9E244D-3F8B-59DF-801C-03BB392BC6F1}" dt="2026-08-20T07:29:18.402" v="18" actId="27636"/>
+          <ac:spMkLst>
+            <pc:docMk/>
+            <pc:sldMk cId="0" sldId="257"/>
+            <ac:spMk id="20" creationId="{00000000-0000-0000-0000-000000000000}"/>
+          </ac:spMkLst>
+        </pc:spChg>
+        <pc:spChg chg="mod">
+          <ac:chgData name="Franck Sevin" userId="82d950c0-7bb5-4310-a4fc-a877d4bbe588" providerId="ADAL" clId="{EB9E244D-3F8B-59DF-801C-03BB392BC6F1}" dt="2026-08-20T07:29:18.403" v="19" actId="27636"/>
+          <ac:spMkLst>
+            <pc:docMk/>
+            <pc:sldMk cId="0" sldId="257"/>
+            <ac:spMk id="32" creationId="{00000000-0000-0000-0000-000000000000}"/>
+          </ac:spMkLst>
+        </pc:spChg>
+      </pc:sldChg>
+      <pc:sldChg chg="modSp mod">
+        <pc:chgData name="Franck Sevin" userId="82d950c0-7bb5-4310-a4fc-a877d4bbe588" providerId="ADAL" clId="{EB9E244D-3F8B-59DF-801C-03BB392BC6F1}" dt="2026-08-20T07:29:18.406" v="21" actId="27636"/>
+        <pc:sldMkLst>
+          <pc:docMk/>
+          <pc:sldMk cId="0" sldId="258"/>
+        </pc:sldMkLst>
+        <pc:spChg chg="mod">
+          <ac:chgData name="Franck Sevin" userId="82d950c0-7bb5-4310-a4fc-a877d4bbe588" providerId="ADAL" clId="{EB9E244D-3F8B-59DF-801C-03BB392BC6F1}" dt="2026-08-20T07:29:18.406" v="21" actId="27636"/>
+          <ac:spMkLst>
+            <pc:docMk/>
+            <pc:sldMk cId="0" sldId="258"/>
+            <ac:spMk id="3" creationId="{00000000-0000-0000-0000-000000000000}"/>
+          </ac:spMkLst>
+        </pc:spChg>
+      </pc:sldChg>
+      <pc:sldChg chg="modSp mod">
+        <pc:chgData name="Franck Sevin" userId="82d950c0-7bb5-4310-a4fc-a877d4bbe588" providerId="ADAL" clId="{EB9E244D-3F8B-59DF-801C-03BB392BC6F1}" dt="2026-08-20T07:29:18.380" v="10" actId="27636"/>
+        <pc:sldMkLst>
+          <pc:docMk/>
+          <pc:sldMk cId="0" sldId="259"/>
+        </pc:sldMkLst>
+        <pc:spChg chg="mod">
+          <ac:chgData name="Franck Sevin" userId="82d950c0-7bb5-4310-a4fc-a877d4bbe588" providerId="ADAL" clId="{EB9E244D-3F8B-59DF-801C-03BB392BC6F1}" dt="2026-08-20T07:29:18.380" v="10" actId="27636"/>
+          <ac:spMkLst>
+            <pc:docMk/>
+            <pc:sldMk cId="0" sldId="259"/>
+            <ac:spMk id="22" creationId="{00000000-0000-0000-0000-000000000000}"/>
+          </ac:spMkLst>
+        </pc:spChg>
+      </pc:sldChg>
+      <pc:sldChg chg="modSp mod">
+        <pc:chgData name="Franck Sevin" userId="82d950c0-7bb5-4310-a4fc-a877d4bbe588" providerId="ADAL" clId="{EB9E244D-3F8B-59DF-801C-03BB392BC6F1}" dt="2026-08-20T07:29:18.387" v="12" actId="27636"/>
+        <pc:sldMkLst>
+          <pc:docMk/>
+          <pc:sldMk cId="0" sldId="260"/>
+        </pc:sldMkLst>
+        <pc:spChg chg="mod">
+          <ac:chgData name="Franck Sevin" userId="82d950c0-7bb5-4310-a4fc-a877d4bbe588" providerId="ADAL" clId="{EB9E244D-3F8B-59DF-801C-03BB392BC6F1}" dt="2026-08-20T07:29:18.386" v="11" actId="27636"/>
+          <ac:spMkLst>
+            <pc:docMk/>
+            <pc:sldMk cId="0" sldId="260"/>
+            <ac:spMk id="7" creationId="{00000000-0000-0000-0000-000000000000}"/>
+          </ac:spMkLst>
+        </pc:spChg>
+        <pc:spChg chg="mod">
+          <ac:chgData name="Franck Sevin" userId="82d950c0-7bb5-4310-a4fc-a877d4bbe588" providerId="ADAL" clId="{EB9E244D-3F8B-59DF-801C-03BB392BC6F1}" dt="2026-08-20T07:29:18.387" v="12" actId="27636"/>
+          <ac:spMkLst>
+            <pc:docMk/>
+            <pc:sldMk cId="0" sldId="260"/>
+            <ac:spMk id="9" creationId="{00000000-0000-0000-0000-000000000000}"/>
+          </ac:spMkLst>
+        </pc:spChg>
+      </pc:sldChg>
+      <pc:sldChg chg="modSp mod">
+        <pc:chgData name="Franck Sevin" userId="82d950c0-7bb5-4310-a4fc-a877d4bbe588" providerId="ADAL" clId="{EB9E244D-3F8B-59DF-801C-03BB392BC6F1}" dt="2026-08-20T07:29:18.390" v="13" actId="27636"/>
+        <pc:sldMkLst>
+          <pc:docMk/>
+          <pc:sldMk cId="0" sldId="261"/>
+        </pc:sldMkLst>
+        <pc:spChg chg="mod">
+          <ac:chgData name="Franck Sevin" userId="82d950c0-7bb5-4310-a4fc-a877d4bbe588" providerId="ADAL" clId="{EB9E244D-3F8B-59DF-801C-03BB392BC6F1}" dt="2026-08-20T07:29:18.390" v="13" actId="27636"/>
+          <ac:spMkLst>
+            <pc:docMk/>
+            <pc:sldMk cId="0" sldId="261"/>
+            <ac:spMk id="19" creationId="{00000000-0000-0000-0000-000000000000}"/>
+          </ac:spMkLst>
+        </pc:spChg>
+      </pc:sldChg>
+      <pc:sldChg chg="modSp mod">
+        <pc:chgData name="Franck Sevin" userId="82d950c0-7bb5-4310-a4fc-a877d4bbe588" providerId="ADAL" clId="{EB9E244D-3F8B-59DF-801C-03BB392BC6F1}" dt="2026-08-20T07:29:18.397" v="15" actId="27636"/>
+        <pc:sldMkLst>
+          <pc:docMk/>
+          <pc:sldMk cId="0" sldId="265"/>
+        </pc:sldMkLst>
+        <pc:spChg chg="mod">
+          <ac:chgData name="Franck Sevin" userId="82d950c0-7bb5-4310-a4fc-a877d4bbe588" providerId="ADAL" clId="{EB9E244D-3F8B-59DF-801C-03BB392BC6F1}" dt="2026-08-20T07:29:18.395" v="14" actId="27636"/>
+          <ac:spMkLst>
+            <pc:docMk/>
+            <pc:sldMk cId="0" sldId="265"/>
+            <ac:spMk id="3" creationId="{00000000-0000-0000-0000-000000000000}"/>
+          </ac:spMkLst>
+        </pc:spChg>
+        <pc:spChg chg="mod">
+          <ac:chgData name="Franck Sevin" userId="82d950c0-7bb5-4310-a4fc-a877d4bbe588" providerId="ADAL" clId="{EB9E244D-3F8B-59DF-801C-03BB392BC6F1}" dt="2026-08-20T07:29:18.397" v="15" actId="27636"/>
+          <ac:spMkLst>
+            <pc:docMk/>
+            <pc:sldMk cId="0" sldId="265"/>
+            <ac:spMk id="26" creationId="{00000000-0000-0000-0000-000000000000}"/>
+          </ac:spMkLst>
+        </pc:spChg>
+      </pc:sldChg>
       <pc:sldChg chg="ord">
         <pc:chgData name="Franck Sevin" userId="82d950c0-7bb5-4310-a4fc-a877d4bbe588" providerId="ADAL" clId="{EB9E244D-3F8B-59DF-801C-03BB392BC6F1}" dt="2026-08-17T14:29:13.189" v="6" actId="20578"/>
         <pc:sldMkLst>
           <pc:docMk/>
           <pc:sldMk cId="0" sldId="266"/>
         </pc:sldMkLst>
+      </pc:sldChg>
+      <pc:sldChg chg="addSp modSp new mod">
+        <pc:chgData name="Franck Sevin" userId="82d950c0-7bb5-4310-a4fc-a877d4bbe588" providerId="ADAL" clId="{EB9E244D-3F8B-59DF-801C-03BB392BC6F1}" dt="2026-08-20T07:29:39.905" v="22" actId="1076"/>
+        <pc:sldMkLst>
+          <pc:docMk/>
+          <pc:sldMk cId="3637365301" sldId="267"/>
+        </pc:sldMkLst>
+        <pc:picChg chg="add mod">
+          <ac:chgData name="Franck Sevin" userId="82d950c0-7bb5-4310-a4fc-a877d4bbe588" providerId="ADAL" clId="{EB9E244D-3F8B-59DF-801C-03BB392BC6F1}" dt="2026-08-20T07:29:39.905" v="22" actId="1076"/>
+          <ac:picMkLst>
+            <pc:docMk/>
+            <pc:sldMk cId="3637365301" sldId="267"/>
+            <ac:picMk id="2" creationId="{264DAC97-E772-9403-343E-5B1F7C03A370}"/>
+          </ac:picMkLst>
+        </pc:picChg>
       </pc:sldChg>
     </pc:docChg>
   </pc:docChgLst>
@@ -458,7 +620,7 @@
           <a:p>
             <a:fld id="{F7021451-1387-4CA6-816F-3879F97B5CBC}" type="slidenum">
               <a:rPr lang="en-US"/>
-              <a:t>11</a:t>
+              <a:t>12</a:t>
             </a:fld>
             <a:endParaRPr lang="en-US"/>
           </a:p>
@@ -725,7 +887,7 @@
           <a:p>
             <a:fld id="{F7021451-1387-4CA6-816F-3879F97B5CBC}" type="slidenum">
               <a:rPr lang="en-US"/>
-              <a:t>5</a:t>
+              <a:t>6</a:t>
             </a:fld>
             <a:endParaRPr lang="en-US"/>
           </a:p>
@@ -814,7 +976,7 @@
           <a:p>
             <a:fld id="{F7021451-1387-4CA6-816F-3879F97B5CBC}" type="slidenum">
               <a:rPr lang="en-US"/>
-              <a:t>6</a:t>
+              <a:t>7</a:t>
             </a:fld>
             <a:endParaRPr lang="en-US"/>
           </a:p>
@@ -903,7 +1065,7 @@
           <a:p>
             <a:fld id="{F7021451-1387-4CA6-816F-3879F97B5CBC}" type="slidenum">
               <a:rPr lang="en-US"/>
-              <a:t>7</a:t>
+              <a:t>8</a:t>
             </a:fld>
             <a:endParaRPr lang="en-US"/>
           </a:p>
@@ -992,7 +1154,7 @@
           <a:p>
             <a:fld id="{F7021451-1387-4CA6-816F-3879F97B5CBC}" type="slidenum">
               <a:rPr lang="en-US"/>
-              <a:t>8</a:t>
+              <a:t>9</a:t>
             </a:fld>
             <a:endParaRPr lang="en-US"/>
           </a:p>
@@ -1081,7 +1243,7 @@
           <a:p>
             <a:fld id="{F7021451-1387-4CA6-816F-3879F97B5CBC}" type="slidenum">
               <a:rPr lang="en-US"/>
-              <a:t>9</a:t>
+              <a:t>10</a:t>
             </a:fld>
             <a:endParaRPr lang="en-US"/>
           </a:p>
@@ -1170,7 +1332,7 @@
           <a:p>
             <a:fld id="{F7021451-1387-4CA6-816F-3879F97B5CBC}" type="slidenum">
               <a:rPr lang="en-US"/>
-              <a:t>10</a:t>
+              <a:t>11</a:t>
             </a:fld>
             <a:endParaRPr lang="en-US"/>
           </a:p>
@@ -1371,7 +1533,7 @@
           </a:prstGeom>
           <a:extLst>
             <a:ext uri="{C572A759-6A51-4108-AA02-DFA0A04FC94B}">
-              <ma14:wrappingTextBoxFlag xmlns:ma14="http://schemas.microsoft.com/office/mac/drawingml/2011/main" xmlns="" val="0"/>
+              <ma14:wrappingTextBoxFlag xmlns="" xmlns:ma14="http://schemas.microsoft.com/office/mac/drawingml/2011/main" val="0"/>
             </a:ext>
           </a:extLst>
         </p:spPr>
@@ -1449,7 +1611,7 @@
           </a:prstGeom>
           <a:extLst>
             <a:ext uri="{C572A759-6A51-4108-AA02-DFA0A04FC94B}">
-              <ma14:wrappingTextBoxFlag xmlns:ma14="http://schemas.microsoft.com/office/mac/drawingml/2011/main" xmlns="" val="0"/>
+              <ma14:wrappingTextBoxFlag xmlns="" xmlns:ma14="http://schemas.microsoft.com/office/mac/drawingml/2011/main" val="0"/>
             </a:ext>
           </a:extLst>
         </p:spPr>
@@ -1879,7 +2041,7 @@
         </p:spPr>
         <p:txBody>
           <a:bodyPr wrap="square" lIns="0" tIns="0" rIns="0" bIns="0" rtlCol="0" anchor="ctr">
-            <a:normAutofit/>
+            <a:normAutofit fontScale="92500"/>
           </a:bodyPr>
           <a:lstStyle/>
           <a:p>
@@ -2027,7 +2189,7 @@
         </p:spPr>
         <p:txBody>
           <a:bodyPr wrap="square" lIns="0" tIns="0" rIns="0" bIns="0" rtlCol="0" anchor="ctr">
-            <a:normAutofit/>
+            <a:normAutofit fontScale="92500"/>
           </a:bodyPr>
           <a:lstStyle/>
           <a:p>
@@ -2055,6 +2217,593 @@
 </file>
 
 <file path=ppt/slides/slide10.xml><?xml version="1.0" encoding="utf-8"?>
+<p:sld xmlns:a="http://schemas.openxmlformats.org/drawingml/2006/main" xmlns:r="http://schemas.openxmlformats.org/officeDocument/2006/relationships" xmlns:p="http://schemas.openxmlformats.org/presentationml/2006/main">
+  <p:cSld name="Slide 8">
+    <p:spTree>
+      <p:nvGrpSpPr>
+        <p:cNvPr id="1" name=""/>
+        <p:cNvGrpSpPr/>
+        <p:nvPr/>
+      </p:nvGrpSpPr>
+      <p:grpSpPr>
+        <a:xfrm>
+          <a:off x="0" y="0"/>
+          <a:ext cx="0" cy="0"/>
+          <a:chOff x="0" y="0"/>
+          <a:chExt cx="0" cy="0"/>
+        </a:xfrm>
+      </p:grpSpPr>
+      <p:sp>
+        <p:nvSpPr>
+          <p:cNvPr id="2" name="Text 0"/>
+          <p:cNvSpPr/>
+          <p:nvPr/>
+        </p:nvSpPr>
+        <p:spPr>
+          <a:xfrm>
+            <a:off x="566928" y="347472"/>
+            <a:ext cx="2651760" cy="201168"/>
+          </a:xfrm>
+          <a:prstGeom prst="rect">
+            <a:avLst/>
+          </a:prstGeom>
+          <a:noFill/>
+          <a:ln/>
+        </p:spPr>
+        <p:txBody>
+          <a:bodyPr wrap="square" lIns="0" tIns="0" rIns="0" bIns="0" rtlCol="0" anchor="ctr">
+            <a:normAutofit/>
+          </a:bodyPr>
+          <a:lstStyle/>
+          <a:p>
+            <a:pPr marL="0" indent="0">
+              <a:buNone/>
+            </a:pPr>
+            <a:r>
+              <a:rPr lang="en-US" sz="1000" b="1" dirty="0">
+                <a:solidFill>
+                  <a:srgbClr val="FA0F00"/>
+                </a:solidFill>
+              </a:rPr>
+              <a:t>7 • STEPS 5–6</a:t>
+            </a:r>
+            <a:endParaRPr lang="en-US" sz="1000" dirty="0"/>
+          </a:p>
+        </p:txBody>
+      </p:sp>
+      <p:sp>
+        <p:nvSpPr>
+          <p:cNvPr id="3" name="Text 1"/>
+          <p:cNvSpPr/>
+          <p:nvPr/>
+        </p:nvSpPr>
+        <p:spPr>
+          <a:xfrm>
+            <a:off x="548640" y="603504"/>
+            <a:ext cx="9966960" cy="585216"/>
+          </a:xfrm>
+          <a:prstGeom prst="rect">
+            <a:avLst/>
+          </a:prstGeom>
+          <a:noFill/>
+          <a:ln/>
+        </p:spPr>
+        <p:txBody>
+          <a:bodyPr wrap="square" lIns="0" tIns="0" rIns="0" bIns="0" rtlCol="0" anchor="ctr">
+            <a:normAutofit/>
+          </a:bodyPr>
+          <a:lstStyle/>
+          <a:p>
+            <a:pPr marL="0" indent="0">
+              <a:buNone/>
+            </a:pPr>
+            <a:r>
+              <a:rPr lang="en-US" sz="2800" b="1" dirty="0">
+                <a:solidFill>
+                  <a:srgbClr val="111111"/>
+                </a:solidFill>
+              </a:rPr>
+              <a:t>Registration and deployment are two different paths</a:t>
+            </a:r>
+            <a:endParaRPr lang="en-US" sz="2800" dirty="0"/>
+          </a:p>
+        </p:txBody>
+      </p:sp>
+      <p:sp>
+        <p:nvSpPr>
+          <p:cNvPr id="4" name="Text 2"/>
+          <p:cNvSpPr/>
+          <p:nvPr/>
+        </p:nvSpPr>
+        <p:spPr>
+          <a:xfrm>
+            <a:off x="566928" y="1225296"/>
+            <a:ext cx="10789920" cy="420624"/>
+          </a:xfrm>
+          <a:prstGeom prst="rect">
+            <a:avLst/>
+          </a:prstGeom>
+          <a:noFill/>
+          <a:ln/>
+        </p:spPr>
+        <p:txBody>
+          <a:bodyPr wrap="square" lIns="0" tIns="0" rIns="0" bIns="0" rtlCol="0" anchor="ctr">
+            <a:normAutofit/>
+          </a:bodyPr>
+          <a:lstStyle/>
+          <a:p>
+            <a:pPr marL="0" indent="0">
+              <a:buNone/>
+            </a:pPr>
+            <a:r>
+              <a:rPr lang="en-US" sz="1400" dirty="0">
+                <a:solidFill>
+                  <a:srgbClr val="6B7280"/>
+                </a:solidFill>
+              </a:rPr>
+              <a:t>A push updates the EDS code bus. A Worker route update requires wrangler deploy.</a:t>
+            </a:r>
+            <a:endParaRPr lang="en-US" sz="1400" dirty="0"/>
+          </a:p>
+        </p:txBody>
+      </p:sp>
+      <p:pic>
+        <p:nvPicPr>
+          <p:cNvPr id="5" name="Image 0" descr="/mnt/data/firefly_variant_work/assets/deploy.png"/>
+          <p:cNvPicPr>
+            <a:picLocks noChangeAspect="1"/>
+          </p:cNvPicPr>
+          <p:nvPr/>
+        </p:nvPicPr>
+        <p:blipFill>
+          <a:blip r:embed="rId3"/>
+          <a:stretch>
+            <a:fillRect/>
+          </a:stretch>
+        </p:blipFill>
+        <p:spPr>
+          <a:xfrm>
+            <a:off x="2175634" y="1828800"/>
+            <a:ext cx="7846828" cy="1874520"/>
+          </a:xfrm>
+          <a:prstGeom prst="rect">
+            <a:avLst/>
+          </a:prstGeom>
+        </p:spPr>
+      </p:pic>
+      <p:sp>
+        <p:nvSpPr>
+          <p:cNvPr id="6" name="Shape 3"/>
+          <p:cNvSpPr/>
+          <p:nvPr/>
+        </p:nvSpPr>
+        <p:spPr>
+          <a:xfrm>
+            <a:off x="566928" y="3931920"/>
+            <a:ext cx="5321808" cy="1664208"/>
+          </a:xfrm>
+          <a:prstGeom prst="roundRect">
+            <a:avLst>
+              <a:gd name="adj" fmla="val 9890"/>
+            </a:avLst>
+          </a:prstGeom>
+          <a:solidFill>
+            <a:srgbClr val="FFFFFF"/>
+          </a:solidFill>
+          <a:ln w="12700">
+            <a:solidFill>
+              <a:srgbClr val="E5E7EB"/>
+            </a:solidFill>
+            <a:prstDash val="solid"/>
+          </a:ln>
+        </p:spPr>
+        <p:txBody>
+          <a:bodyPr/>
+          <a:lstStyle/>
+          <a:p>
+            <a:endParaRPr lang="en-US"/>
+          </a:p>
+        </p:txBody>
+      </p:sp>
+      <p:sp>
+        <p:nvSpPr>
+          <p:cNvPr id="7" name="Text 4"/>
+          <p:cNvSpPr/>
+          <p:nvPr/>
+        </p:nvSpPr>
+        <p:spPr>
+          <a:xfrm>
+            <a:off x="822960" y="4151376"/>
+            <a:ext cx="1005840" cy="201168"/>
+          </a:xfrm>
+          <a:prstGeom prst="rect">
+            <a:avLst/>
+          </a:prstGeom>
+          <a:noFill/>
+          <a:ln/>
+        </p:spPr>
+        <p:txBody>
+          <a:bodyPr wrap="square" lIns="0" tIns="0" rIns="0" bIns="0" rtlCol="0" anchor="ctr"/>
+          <a:lstStyle/>
+          <a:p>
+            <a:pPr marL="0" indent="0" algn="ctr">
+              <a:buNone/>
+            </a:pPr>
+            <a:r>
+              <a:rPr lang="en-US" sz="1000" b="1" dirty="0">
+                <a:solidFill>
+                  <a:srgbClr val="FFFFFF"/>
+                </a:solidFill>
+              </a:rPr>
+              <a:t>REGISTER</a:t>
+            </a:r>
+            <a:endParaRPr lang="en-US" sz="1000" dirty="0"/>
+          </a:p>
+        </p:txBody>
+      </p:sp>
+      <p:sp>
+        <p:nvSpPr>
+          <p:cNvPr id="8" name="Shape 5"/>
+          <p:cNvSpPr/>
+          <p:nvPr/>
+        </p:nvSpPr>
+        <p:spPr>
+          <a:xfrm>
+            <a:off x="786384" y="4105656"/>
+            <a:ext cx="1078992" cy="329184"/>
+          </a:xfrm>
+          <a:prstGeom prst="roundRect">
+            <a:avLst>
+              <a:gd name="adj" fmla="val 41667"/>
+            </a:avLst>
+          </a:prstGeom>
+          <a:solidFill>
+            <a:srgbClr val="111111"/>
+          </a:solidFill>
+          <a:ln w="12700">
+            <a:solidFill>
+              <a:srgbClr val="111111"/>
+            </a:solidFill>
+            <a:prstDash val="solid"/>
+          </a:ln>
+        </p:spPr>
+        <p:txBody>
+          <a:bodyPr/>
+          <a:lstStyle/>
+          <a:p>
+            <a:endParaRPr lang="en-US"/>
+          </a:p>
+        </p:txBody>
+      </p:sp>
+      <p:sp>
+        <p:nvSpPr>
+          <p:cNvPr id="9" name="Text 6"/>
+          <p:cNvSpPr/>
+          <p:nvPr/>
+        </p:nvSpPr>
+        <p:spPr>
+          <a:xfrm>
+            <a:off x="822960" y="4178808"/>
+            <a:ext cx="1005840" cy="146304"/>
+          </a:xfrm>
+          <a:prstGeom prst="rect">
+            <a:avLst/>
+          </a:prstGeom>
+          <a:noFill/>
+          <a:ln/>
+        </p:spPr>
+        <p:txBody>
+          <a:bodyPr wrap="square" lIns="0" tIns="0" rIns="0" bIns="0" rtlCol="0" anchor="ctr"/>
+          <a:lstStyle/>
+          <a:p>
+            <a:pPr marL="0" indent="0" algn="ctr">
+              <a:buNone/>
+            </a:pPr>
+            <a:r>
+              <a:rPr lang="en-US" sz="900" b="1" dirty="0">
+                <a:solidFill>
+                  <a:srgbClr val="FFFFFF"/>
+                </a:solidFill>
+              </a:rPr>
+              <a:t>REGISTER</a:t>
+            </a:r>
+            <a:endParaRPr lang="en-US" sz="900" dirty="0"/>
+          </a:p>
+        </p:txBody>
+      </p:sp>
+      <p:sp>
+        <p:nvSpPr>
+          <p:cNvPr id="10" name="Text 7"/>
+          <p:cNvSpPr/>
+          <p:nvPr/>
+        </p:nvSpPr>
+        <p:spPr>
+          <a:xfrm>
+            <a:off x="822960" y="4617720"/>
+            <a:ext cx="4526280" cy="749808"/>
+          </a:xfrm>
+          <a:prstGeom prst="rect">
+            <a:avLst/>
+          </a:prstGeom>
+          <a:noFill/>
+          <a:ln/>
+        </p:spPr>
+        <p:txBody>
+          <a:bodyPr wrap="square" lIns="0" tIns="0" rIns="0" bIns="0" rtlCol="0" anchor="ctr">
+            <a:normAutofit/>
+          </a:bodyPr>
+          <a:lstStyle/>
+          <a:p>
+            <a:pPr marL="0" indent="0">
+              <a:buNone/>
+            </a:pPr>
+            <a:r>
+              <a:rPr lang="en-US" sz="1300" dirty="0">
+                <a:solidFill>
+                  <a:srgbClr val="1F2937"/>
+                </a:solidFill>
+              </a:rPr>
+              <a:t>• Exact block id: product-variant</a:t>
+            </a:r>
+            <a:endParaRPr lang="en-US" sz="1300" dirty="0"/>
+          </a:p>
+          <a:p>
+            <a:pPr marL="0" indent="0">
+              <a:buNone/>
+            </a:pPr>
+            <a:r>
+              <a:rPr lang="en-US" sz="1300" dirty="0">
+                <a:solidFill>
+                  <a:srgbClr val="1F2937"/>
+                </a:solidFill>
+              </a:rPr>
+              <a:t>• Add id to each relevant section filter</a:t>
+            </a:r>
+            <a:endParaRPr lang="en-US" sz="1300" dirty="0"/>
+          </a:p>
+          <a:p>
+            <a:pPr marL="0" indent="0">
+              <a:buNone/>
+            </a:pPr>
+            <a:r>
+              <a:rPr lang="en-US" sz="1300" dirty="0">
+                <a:solidFill>
+                  <a:srgbClr val="1F2937"/>
+                </a:solidFill>
+              </a:rPr>
+              <a:t>• npm run build:json</a:t>
+            </a:r>
+            <a:endParaRPr lang="en-US" sz="1300" dirty="0"/>
+          </a:p>
+        </p:txBody>
+      </p:sp>
+      <p:sp>
+        <p:nvSpPr>
+          <p:cNvPr id="11" name="Shape 8"/>
+          <p:cNvSpPr/>
+          <p:nvPr/>
+        </p:nvSpPr>
+        <p:spPr>
+          <a:xfrm>
+            <a:off x="6163056" y="3931920"/>
+            <a:ext cx="5468112" cy="1664208"/>
+          </a:xfrm>
+          <a:prstGeom prst="roundRect">
+            <a:avLst>
+              <a:gd name="adj" fmla="val 9890"/>
+            </a:avLst>
+          </a:prstGeom>
+          <a:solidFill>
+            <a:srgbClr val="FFF8F7"/>
+          </a:solidFill>
+          <a:ln w="12700">
+            <a:solidFill>
+              <a:srgbClr val="FECACA"/>
+            </a:solidFill>
+            <a:prstDash val="solid"/>
+          </a:ln>
+        </p:spPr>
+        <p:txBody>
+          <a:bodyPr/>
+          <a:lstStyle/>
+          <a:p>
+            <a:endParaRPr lang="en-US"/>
+          </a:p>
+        </p:txBody>
+      </p:sp>
+      <p:sp>
+        <p:nvSpPr>
+          <p:cNvPr id="12" name="Shape 9"/>
+          <p:cNvSpPr/>
+          <p:nvPr/>
+        </p:nvSpPr>
+        <p:spPr>
+          <a:xfrm>
+            <a:off x="6400800" y="4105656"/>
+            <a:ext cx="914400" cy="329184"/>
+          </a:xfrm>
+          <a:prstGeom prst="roundRect">
+            <a:avLst>
+              <a:gd name="adj" fmla="val 41667"/>
+            </a:avLst>
+          </a:prstGeom>
+          <a:solidFill>
+            <a:srgbClr val="FA0F00"/>
+          </a:solidFill>
+          <a:ln w="12700">
+            <a:solidFill>
+              <a:srgbClr val="FA0F00"/>
+            </a:solidFill>
+            <a:prstDash val="solid"/>
+          </a:ln>
+        </p:spPr>
+        <p:txBody>
+          <a:bodyPr/>
+          <a:lstStyle/>
+          <a:p>
+            <a:endParaRPr lang="en-US"/>
+          </a:p>
+        </p:txBody>
+      </p:sp>
+      <p:sp>
+        <p:nvSpPr>
+          <p:cNvPr id="13" name="Text 10"/>
+          <p:cNvSpPr/>
+          <p:nvPr/>
+        </p:nvSpPr>
+        <p:spPr>
+          <a:xfrm>
+            <a:off x="6446520" y="4178808"/>
+            <a:ext cx="822960" cy="146304"/>
+          </a:xfrm>
+          <a:prstGeom prst="rect">
+            <a:avLst/>
+          </a:prstGeom>
+          <a:noFill/>
+          <a:ln/>
+        </p:spPr>
+        <p:txBody>
+          <a:bodyPr wrap="square" lIns="0" tIns="0" rIns="0" bIns="0" rtlCol="0" anchor="ctr"/>
+          <a:lstStyle/>
+          <a:p>
+            <a:pPr marL="0" indent="0" algn="ctr">
+              <a:buNone/>
+            </a:pPr>
+            <a:r>
+              <a:rPr lang="en-US" sz="900" b="1" dirty="0">
+                <a:solidFill>
+                  <a:srgbClr val="FFFFFF"/>
+                </a:solidFill>
+              </a:rPr>
+              <a:t>DEPLOY</a:t>
+            </a:r>
+            <a:endParaRPr lang="en-US" sz="900" dirty="0"/>
+          </a:p>
+        </p:txBody>
+      </p:sp>
+      <p:sp>
+        <p:nvSpPr>
+          <p:cNvPr id="14" name="Text 11"/>
+          <p:cNvSpPr/>
+          <p:nvPr/>
+        </p:nvSpPr>
+        <p:spPr>
+          <a:xfrm>
+            <a:off x="6400800" y="4617720"/>
+            <a:ext cx="4663440" cy="749808"/>
+          </a:xfrm>
+          <a:prstGeom prst="rect">
+            <a:avLst/>
+          </a:prstGeom>
+          <a:noFill/>
+          <a:ln/>
+        </p:spPr>
+        <p:txBody>
+          <a:bodyPr wrap="square" lIns="0" tIns="0" rIns="0" bIns="0" rtlCol="0" anchor="ctr">
+            <a:normAutofit/>
+          </a:bodyPr>
+          <a:lstStyle/>
+          <a:p>
+            <a:pPr marL="0" indent="0">
+              <a:buNone/>
+            </a:pPr>
+            <a:r>
+              <a:rPr lang="en-US" sz="1300" dirty="0">
+                <a:solidFill>
+                  <a:srgbClr val="1F2937"/>
+                </a:solidFill>
+              </a:rPr>
+              <a:t>• git push → EDS code bus</a:t>
+            </a:r>
+            <a:endParaRPr lang="en-US" sz="1300" dirty="0"/>
+          </a:p>
+          <a:p>
+            <a:pPr marL="0" indent="0">
+              <a:buNone/>
+            </a:pPr>
+            <a:r>
+              <a:rPr lang="en-US" sz="1300" dirty="0">
+                <a:solidFill>
+                  <a:srgbClr val="1F2937"/>
+                </a:solidFill>
+              </a:rPr>
+              <a:t>• npm run deploy:edge → Cloudflare Worker</a:t>
+            </a:r>
+            <a:endParaRPr lang="en-US" sz="1300" dirty="0"/>
+          </a:p>
+          <a:p>
+            <a:pPr marL="0" indent="0">
+              <a:buNone/>
+            </a:pPr>
+            <a:r>
+              <a:rPr lang="en-US" sz="1300" dirty="0">
+                <a:solidFill>
+                  <a:srgbClr val="1F2937"/>
+                </a:solidFill>
+              </a:rPr>
+              <a:t>• curl Worker route before UE</a:t>
+            </a:r>
+            <a:endParaRPr lang="en-US" sz="1300" dirty="0"/>
+          </a:p>
+        </p:txBody>
+      </p:sp>
+      <p:sp>
+        <p:nvSpPr>
+          <p:cNvPr id="25" name="Slide Number Placeholder 0"/>
+          <p:cNvSpPr>
+            <a:spLocks noGrp="1"/>
+          </p:cNvSpPr>
+          <p:nvPr>
+            <p:ph type="sldNum" sz="quarter" idx="4294967295"/>
+          </p:nvPr>
+        </p:nvSpPr>
+        <p:spPr>
+          <a:xfrm>
+            <a:off x="11832336" y="6409944"/>
+            <a:ext cx="800000" cy="300000"/>
+          </a:xfrm>
+          <a:prstGeom prst="rect">
+            <a:avLst/>
+          </a:prstGeom>
+          <a:extLst>
+            <a:ext uri="{C572A759-6A51-4108-AA02-DFA0A04FC94B}">
+              <ma14:wrappingTextBoxFlag xmlns="" xmlns:ma14="http://schemas.microsoft.com/office/mac/drawingml/2011/main" val="0"/>
+            </a:ext>
+          </a:extLst>
+        </p:spPr>
+        <p:txBody>
+          <a:bodyPr/>
+          <a:lstStyle>
+            <a:lvl1pPr>
+              <a:defRPr sz="900">
+                <a:solidFill>
+                  <a:srgbClr val="9CA3AF"/>
+                </a:solidFill>
+                <a:latin typeface="Arial"/>
+                <a:ea typeface="Arial"/>
+                <a:cs typeface="Arial"/>
+              </a:defRPr>
+            </a:lvl1pPr>
+          </a:lstStyle>
+          <a:p>
+            <a:pPr algn="l"/>
+            <a:fld id="{F7021451-1387-4CA6-816F-3879F97B5CBC}" type="slidenum">
+              <a:rPr lang="en-US" b="0"/>
+              <a:t>10</a:t>
+            </a:fld>
+            <a:endParaRPr lang="en-US"/>
+          </a:p>
+        </p:txBody>
+      </p:sp>
+    </p:spTree>
+  </p:cSld>
+  <p:clrMapOvr>
+    <a:masterClrMapping/>
+  </p:clrMapOvr>
+</p:sld>
+</file>
+
+<file path=ppt/slides/slide11.xml><?xml version="1.0" encoding="utf-8"?>
 <p:sld xmlns:a="http://schemas.openxmlformats.org/drawingml/2006/main" xmlns:r="http://schemas.openxmlformats.org/officeDocument/2006/relationships" xmlns:p="http://schemas.openxmlformats.org/presentationml/2006/main">
   <p:cSld name="Slide 9">
     <p:spTree>
@@ -2728,7 +3477,7 @@
           </a:prstGeom>
           <a:extLst>
             <a:ext uri="{C572A759-6A51-4108-AA02-DFA0A04FC94B}">
-              <ma14:wrappingTextBoxFlag xmlns:ma14="http://schemas.microsoft.com/office/mac/drawingml/2011/main" xmlns="" val="0"/>
+              <ma14:wrappingTextBoxFlag xmlns="" xmlns:ma14="http://schemas.microsoft.com/office/mac/drawingml/2011/main" val="0"/>
             </a:ext>
           </a:extLst>
         </p:spPr>
@@ -2750,7 +3499,7 @@
             <a:pPr algn="l"/>
             <a:fld id="{F7021451-1387-4CA6-816F-3879F97B5CBC}" type="slidenum">
               <a:rPr lang="en-US" b="0"/>
-              <a:t>10</a:t>
+              <a:t>11</a:t>
             </a:fld>
             <a:endParaRPr lang="en-US"/>
           </a:p>
@@ -2764,7 +3513,7 @@
 </p:sld>
 </file>
 
-<file path=ppt/slides/slide11.xml><?xml version="1.0" encoding="utf-8"?>
+<file path=ppt/slides/slide12.xml><?xml version="1.0" encoding="utf-8"?>
 <p:sld xmlns:a="http://schemas.openxmlformats.org/drawingml/2006/main" xmlns:r="http://schemas.openxmlformats.org/officeDocument/2006/relationships" xmlns:p="http://schemas.openxmlformats.org/presentationml/2006/main">
   <p:cSld name="Slide 10">
     <p:spTree>
@@ -2838,7 +3587,7 @@
         </p:spPr>
         <p:txBody>
           <a:bodyPr wrap="square" lIns="0" tIns="0" rIns="0" bIns="0" rtlCol="0" anchor="ctr">
-            <a:normAutofit/>
+            <a:normAutofit fontScale="92500"/>
           </a:bodyPr>
           <a:lstStyle/>
           <a:p>
@@ -3647,7 +4396,7 @@
         </p:spPr>
         <p:txBody>
           <a:bodyPr wrap="square" lIns="0" tIns="0" rIns="0" bIns="0" rtlCol="0" anchor="ctr">
-            <a:normAutofit/>
+            <a:normAutofit fontScale="77500" lnSpcReduction="20000"/>
           </a:bodyPr>
           <a:lstStyle/>
           <a:p>
@@ -3686,7 +4435,7 @@
           </a:prstGeom>
           <a:extLst>
             <a:ext uri="{C572A759-6A51-4108-AA02-DFA0A04FC94B}">
-              <ma14:wrappingTextBoxFlag xmlns:ma14="http://schemas.microsoft.com/office/mac/drawingml/2011/main" xmlns="" val="0"/>
+              <ma14:wrappingTextBoxFlag xmlns="" xmlns:ma14="http://schemas.microsoft.com/office/mac/drawingml/2011/main" val="0"/>
             </a:ext>
           </a:extLst>
         </p:spPr>
@@ -3708,7 +4457,7 @@
             <a:pPr algn="l"/>
             <a:fld id="{F7021451-1387-4CA6-816F-3879F97B5CBC}" type="slidenum">
               <a:rPr lang="en-US" b="0"/>
-              <a:t>11</a:t>
+              <a:t>12</a:t>
             </a:fld>
             <a:endParaRPr lang="en-US"/>
           </a:p>
@@ -4192,7 +4941,7 @@
         </p:spPr>
         <p:txBody>
           <a:bodyPr wrap="square" lIns="0" tIns="0" rIns="0" bIns="0" rtlCol="0" anchor="ctr">
-            <a:normAutofit/>
+            <a:normAutofit fontScale="92500" lnSpcReduction="20000"/>
           </a:bodyPr>
           <a:lstStyle/>
           <a:p>
@@ -4416,7 +5165,7 @@
         </p:spPr>
         <p:txBody>
           <a:bodyPr wrap="square" lIns="0" tIns="0" rIns="0" bIns="0" rtlCol="0" anchor="ctr">
-            <a:normAutofit/>
+            <a:normAutofit lnSpcReduction="10000"/>
           </a:bodyPr>
           <a:lstStyle/>
           <a:p>
@@ -4843,7 +5592,7 @@
         </p:spPr>
         <p:txBody>
           <a:bodyPr wrap="square" lIns="0" tIns="0" rIns="0" bIns="0" rtlCol="0" anchor="ctr">
-            <a:normAutofit/>
+            <a:normAutofit lnSpcReduction="10000"/>
           </a:bodyPr>
           <a:lstStyle/>
           <a:p>
@@ -4882,7 +5631,7 @@
           </a:prstGeom>
           <a:extLst>
             <a:ext uri="{C572A759-6A51-4108-AA02-DFA0A04FC94B}">
-              <ma14:wrappingTextBoxFlag xmlns:ma14="http://schemas.microsoft.com/office/mac/drawingml/2011/main" xmlns="" val="0"/>
+              <ma14:wrappingTextBoxFlag xmlns="" xmlns:ma14="http://schemas.microsoft.com/office/mac/drawingml/2011/main" val="0"/>
             </a:ext>
           </a:extLst>
         </p:spPr>
@@ -4992,7 +5741,7 @@
         </p:spPr>
         <p:txBody>
           <a:bodyPr wrap="square" lIns="0" tIns="0" rIns="0" bIns="0" rtlCol="0" anchor="ctr">
-            <a:normAutofit/>
+            <a:normAutofit fontScale="85000" lnSpcReduction="10000"/>
           </a:bodyPr>
           <a:lstStyle/>
           <a:p>
@@ -5167,7 +5916,7 @@
           </a:prstGeom>
           <a:extLst>
             <a:ext uri="{C572A759-6A51-4108-AA02-DFA0A04FC94B}">
-              <ma14:wrappingTextBoxFlag xmlns:ma14="http://schemas.microsoft.com/office/mac/drawingml/2011/main" xmlns="" val="0"/>
+              <ma14:wrappingTextBoxFlag xmlns="" xmlns:ma14="http://schemas.microsoft.com/office/mac/drawingml/2011/main" val="0"/>
             </a:ext>
           </a:extLst>
         </p:spPr>
@@ -5460,6 +6209,66 @@
 
 <file path=ppt/slides/slide5.xml><?xml version="1.0" encoding="utf-8"?>
 <p:sld xmlns:a="http://schemas.openxmlformats.org/drawingml/2006/main" xmlns:r="http://schemas.openxmlformats.org/officeDocument/2006/relationships" xmlns:p="http://schemas.openxmlformats.org/presentationml/2006/main">
+  <p:cSld>
+    <p:spTree>
+      <p:nvGrpSpPr>
+        <p:cNvPr id="1" name=""/>
+        <p:cNvGrpSpPr/>
+        <p:nvPr/>
+      </p:nvGrpSpPr>
+      <p:grpSpPr>
+        <a:xfrm>
+          <a:off x="0" y="0"/>
+          <a:ext cx="0" cy="0"/>
+          <a:chOff x="0" y="0"/>
+          <a:chExt cx="0" cy="0"/>
+        </a:xfrm>
+      </p:grpSpPr>
+      <p:pic>
+        <p:nvPicPr>
+          <p:cNvPr id="2" name="Picture 1">
+            <a:extLst>
+              <a:ext uri="{FF2B5EF4-FFF2-40B4-BE49-F238E27FC236}">
+                <a16:creationId xmlns:a16="http://schemas.microsoft.com/office/drawing/2014/main" id="{264DAC97-E772-9403-343E-5B1F7C03A370}"/>
+              </a:ext>
+            </a:extLst>
+          </p:cNvPr>
+          <p:cNvPicPr>
+            <a:picLocks noChangeAspect="1"/>
+          </p:cNvPicPr>
+          <p:nvPr/>
+        </p:nvPicPr>
+        <p:blipFill>
+          <a:blip r:embed="rId2"/>
+          <a:stretch>
+            <a:fillRect/>
+          </a:stretch>
+        </p:blipFill>
+        <p:spPr>
+          <a:xfrm>
+            <a:off x="687286" y="429016"/>
+            <a:ext cx="10367319" cy="5831617"/>
+          </a:xfrm>
+          <a:prstGeom prst="rect">
+            <a:avLst/>
+          </a:prstGeom>
+        </p:spPr>
+      </p:pic>
+    </p:spTree>
+    <p:extLst>
+      <p:ext uri="{BB962C8B-B14F-4D97-AF65-F5344CB8AC3E}">
+        <p14:creationId xmlns:p14="http://schemas.microsoft.com/office/powerpoint/2010/main" val="3637365301"/>
+      </p:ext>
+    </p:extLst>
+  </p:cSld>
+  <p:clrMapOvr>
+    <a:masterClrMapping/>
+  </p:clrMapOvr>
+</p:sld>
+</file>
+
+<file path=ppt/slides/slide6.xml><?xml version="1.0" encoding="utf-8"?>
+<p:sld xmlns:a="http://schemas.openxmlformats.org/drawingml/2006/main" xmlns:r="http://schemas.openxmlformats.org/officeDocument/2006/relationships" xmlns:p="http://schemas.openxmlformats.org/presentationml/2006/main">
   <p:cSld name="Slide 4">
     <p:spTree>
       <p:nvGrpSpPr>
@@ -6237,7 +7046,7 @@
         </p:spPr>
         <p:txBody>
           <a:bodyPr wrap="square" lIns="0" tIns="0" rIns="0" bIns="0" rtlCol="0" anchor="ctr">
-            <a:normAutofit/>
+            <a:normAutofit lnSpcReduction="10000"/>
           </a:bodyPr>
           <a:lstStyle/>
           <a:p>
@@ -6276,7 +7085,7 @@
           </a:prstGeom>
           <a:extLst>
             <a:ext uri="{C572A759-6A51-4108-AA02-DFA0A04FC94B}">
-              <ma14:wrappingTextBoxFlag xmlns:ma14="http://schemas.microsoft.com/office/mac/drawingml/2011/main" xmlns="" val="0"/>
+              <ma14:wrappingTextBoxFlag xmlns="" xmlns:ma14="http://schemas.microsoft.com/office/mac/drawingml/2011/main" val="0"/>
             </a:ext>
           </a:extLst>
         </p:spPr>
@@ -6298,7 +7107,7 @@
             <a:pPr algn="l"/>
             <a:fld id="{F7021451-1387-4CA6-816F-3879F97B5CBC}" type="slidenum">
               <a:rPr lang="en-US" b="0"/>
-              <a:t>5</a:t>
+              <a:t>6</a:t>
             </a:fld>
             <a:endParaRPr lang="en-US"/>
           </a:p>
@@ -6312,7 +7121,7 @@
 </p:sld>
 </file>
 
-<file path=ppt/slides/slide6.xml><?xml version="1.0" encoding="utf-8"?>
+<file path=ppt/slides/slide7.xml><?xml version="1.0" encoding="utf-8"?>
 <p:sld xmlns:a="http://schemas.openxmlformats.org/drawingml/2006/main" xmlns:r="http://schemas.openxmlformats.org/officeDocument/2006/relationships" xmlns:p="http://schemas.openxmlformats.org/presentationml/2006/main">
   <p:cSld name="Slide 5">
     <p:spTree>
@@ -6520,7 +7329,7 @@
         </p:spPr>
         <p:txBody>
           <a:bodyPr wrap="square" lIns="0" tIns="0" rIns="0" bIns="0" rtlCol="0" anchor="t">
-            <a:normAutofit/>
+            <a:normAutofit fontScale="85000" lnSpcReduction="20000"/>
           </a:bodyPr>
           <a:lstStyle/>
           <a:p>
@@ -6775,7 +7584,7 @@
         </p:spPr>
         <p:txBody>
           <a:bodyPr wrap="square" lIns="0" tIns="0" rIns="0" bIns="0" rtlCol="0" anchor="ctr">
-            <a:normAutofit/>
+            <a:normAutofit fontScale="70000" lnSpcReduction="20000"/>
           </a:bodyPr>
           <a:lstStyle/>
           <a:p>
@@ -6814,7 +7623,7 @@
           </a:prstGeom>
           <a:extLst>
             <a:ext uri="{C572A759-6A51-4108-AA02-DFA0A04FC94B}">
-              <ma14:wrappingTextBoxFlag xmlns:ma14="http://schemas.microsoft.com/office/mac/drawingml/2011/main" xmlns="" val="0"/>
+              <ma14:wrappingTextBoxFlag xmlns="" xmlns:ma14="http://schemas.microsoft.com/office/mac/drawingml/2011/main" val="0"/>
             </a:ext>
           </a:extLst>
         </p:spPr>
@@ -6836,7 +7645,7 @@
             <a:pPr algn="l"/>
             <a:fld id="{F7021451-1387-4CA6-816F-3879F97B5CBC}" type="slidenum">
               <a:rPr lang="en-US" b="0"/>
-              <a:t>6</a:t>
+              <a:t>7</a:t>
             </a:fld>
             <a:endParaRPr lang="en-US"/>
           </a:p>
@@ -6850,7 +7659,7 @@
 </p:sld>
 </file>
 
-<file path=ppt/slides/slide7.xml><?xml version="1.0" encoding="utf-8"?>
+<file path=ppt/slides/slide8.xml><?xml version="1.0" encoding="utf-8"?>
 <p:sld xmlns:a="http://schemas.openxmlformats.org/drawingml/2006/main" xmlns:r="http://schemas.openxmlformats.org/officeDocument/2006/relationships" xmlns:p="http://schemas.openxmlformats.org/presentationml/2006/main">
   <p:cSld name="Slide 6">
     <p:spTree>
@@ -7535,7 +8344,7 @@
         </p:spPr>
         <p:txBody>
           <a:bodyPr wrap="square" lIns="0" tIns="0" rIns="0" bIns="0" rtlCol="0" anchor="ctr">
-            <a:normAutofit/>
+            <a:normAutofit fontScale="92500"/>
           </a:bodyPr>
           <a:lstStyle/>
           <a:p>
@@ -7765,7 +8574,7 @@
           </a:prstGeom>
           <a:extLst>
             <a:ext uri="{C572A759-6A51-4108-AA02-DFA0A04FC94B}">
-              <ma14:wrappingTextBoxFlag xmlns:ma14="http://schemas.microsoft.com/office/mac/drawingml/2011/main" xmlns="" val="0"/>
+              <ma14:wrappingTextBoxFlag xmlns="" xmlns:ma14="http://schemas.microsoft.com/office/mac/drawingml/2011/main" val="0"/>
             </a:ext>
           </a:extLst>
         </p:spPr>
@@ -7787,7 +8596,7 @@
             <a:pPr algn="l"/>
             <a:fld id="{F7021451-1387-4CA6-816F-3879F97B5CBC}" type="slidenum">
               <a:rPr lang="en-US" b="0"/>
-              <a:t>7</a:t>
+              <a:t>8</a:t>
             </a:fld>
             <a:endParaRPr lang="en-US"/>
           </a:p>
@@ -7801,7 +8610,7 @@
 </p:sld>
 </file>
 
-<file path=ppt/slides/slide8.xml><?xml version="1.0" encoding="utf-8"?>
+<file path=ppt/slides/slide9.xml><?xml version="1.0" encoding="utf-8"?>
 <p:sld xmlns:a="http://schemas.openxmlformats.org/drawingml/2006/main" xmlns:r="http://schemas.openxmlformats.org/officeDocument/2006/relationships" xmlns:p="http://schemas.openxmlformats.org/presentationml/2006/main">
   <p:cSld name="Slide 7">
     <p:spTree>
@@ -8357,594 +9166,7 @@
           </a:prstGeom>
           <a:extLst>
             <a:ext uri="{C572A759-6A51-4108-AA02-DFA0A04FC94B}">
-              <ma14:wrappingTextBoxFlag xmlns:ma14="http://schemas.microsoft.com/office/mac/drawingml/2011/main" xmlns="" val="0"/>
-            </a:ext>
-          </a:extLst>
-        </p:spPr>
-        <p:txBody>
-          <a:bodyPr/>
-          <a:lstStyle>
-            <a:lvl1pPr>
-              <a:defRPr sz="900">
-                <a:solidFill>
-                  <a:srgbClr val="9CA3AF"/>
-                </a:solidFill>
-                <a:latin typeface="Arial"/>
-                <a:ea typeface="Arial"/>
-                <a:cs typeface="Arial"/>
-              </a:defRPr>
-            </a:lvl1pPr>
-          </a:lstStyle>
-          <a:p>
-            <a:pPr algn="l"/>
-            <a:fld id="{F7021451-1387-4CA6-816F-3879F97B5CBC}" type="slidenum">
-              <a:rPr lang="en-US" b="0"/>
-              <a:t>8</a:t>
-            </a:fld>
-            <a:endParaRPr lang="en-US"/>
-          </a:p>
-        </p:txBody>
-      </p:sp>
-    </p:spTree>
-  </p:cSld>
-  <p:clrMapOvr>
-    <a:masterClrMapping/>
-  </p:clrMapOvr>
-</p:sld>
-</file>
-
-<file path=ppt/slides/slide9.xml><?xml version="1.0" encoding="utf-8"?>
-<p:sld xmlns:a="http://schemas.openxmlformats.org/drawingml/2006/main" xmlns:r="http://schemas.openxmlformats.org/officeDocument/2006/relationships" xmlns:p="http://schemas.openxmlformats.org/presentationml/2006/main">
-  <p:cSld name="Slide 8">
-    <p:spTree>
-      <p:nvGrpSpPr>
-        <p:cNvPr id="1" name=""/>
-        <p:cNvGrpSpPr/>
-        <p:nvPr/>
-      </p:nvGrpSpPr>
-      <p:grpSpPr>
-        <a:xfrm>
-          <a:off x="0" y="0"/>
-          <a:ext cx="0" cy="0"/>
-          <a:chOff x="0" y="0"/>
-          <a:chExt cx="0" cy="0"/>
-        </a:xfrm>
-      </p:grpSpPr>
-      <p:sp>
-        <p:nvSpPr>
-          <p:cNvPr id="2" name="Text 0"/>
-          <p:cNvSpPr/>
-          <p:nvPr/>
-        </p:nvSpPr>
-        <p:spPr>
-          <a:xfrm>
-            <a:off x="566928" y="347472"/>
-            <a:ext cx="2651760" cy="201168"/>
-          </a:xfrm>
-          <a:prstGeom prst="rect">
-            <a:avLst/>
-          </a:prstGeom>
-          <a:noFill/>
-          <a:ln/>
-        </p:spPr>
-        <p:txBody>
-          <a:bodyPr wrap="square" lIns="0" tIns="0" rIns="0" bIns="0" rtlCol="0" anchor="ctr">
-            <a:normAutofit/>
-          </a:bodyPr>
-          <a:lstStyle/>
-          <a:p>
-            <a:pPr marL="0" indent="0">
-              <a:buNone/>
-            </a:pPr>
-            <a:r>
-              <a:rPr lang="en-US" sz="1000" b="1" dirty="0">
-                <a:solidFill>
-                  <a:srgbClr val="FA0F00"/>
-                </a:solidFill>
-              </a:rPr>
-              <a:t>7 • STEPS 5–6</a:t>
-            </a:r>
-            <a:endParaRPr lang="en-US" sz="1000" dirty="0"/>
-          </a:p>
-        </p:txBody>
-      </p:sp>
-      <p:sp>
-        <p:nvSpPr>
-          <p:cNvPr id="3" name="Text 1"/>
-          <p:cNvSpPr/>
-          <p:nvPr/>
-        </p:nvSpPr>
-        <p:spPr>
-          <a:xfrm>
-            <a:off x="548640" y="603504"/>
-            <a:ext cx="9966960" cy="585216"/>
-          </a:xfrm>
-          <a:prstGeom prst="rect">
-            <a:avLst/>
-          </a:prstGeom>
-          <a:noFill/>
-          <a:ln/>
-        </p:spPr>
-        <p:txBody>
-          <a:bodyPr wrap="square" lIns="0" tIns="0" rIns="0" bIns="0" rtlCol="0" anchor="ctr">
-            <a:normAutofit/>
-          </a:bodyPr>
-          <a:lstStyle/>
-          <a:p>
-            <a:pPr marL="0" indent="0">
-              <a:buNone/>
-            </a:pPr>
-            <a:r>
-              <a:rPr lang="en-US" sz="2800" b="1" dirty="0">
-                <a:solidFill>
-                  <a:srgbClr val="111111"/>
-                </a:solidFill>
-              </a:rPr>
-              <a:t>Registration and deployment are two different paths</a:t>
-            </a:r>
-            <a:endParaRPr lang="en-US" sz="2800" dirty="0"/>
-          </a:p>
-        </p:txBody>
-      </p:sp>
-      <p:sp>
-        <p:nvSpPr>
-          <p:cNvPr id="4" name="Text 2"/>
-          <p:cNvSpPr/>
-          <p:nvPr/>
-        </p:nvSpPr>
-        <p:spPr>
-          <a:xfrm>
-            <a:off x="566928" y="1225296"/>
-            <a:ext cx="10789920" cy="420624"/>
-          </a:xfrm>
-          <a:prstGeom prst="rect">
-            <a:avLst/>
-          </a:prstGeom>
-          <a:noFill/>
-          <a:ln/>
-        </p:spPr>
-        <p:txBody>
-          <a:bodyPr wrap="square" lIns="0" tIns="0" rIns="0" bIns="0" rtlCol="0" anchor="ctr">
-            <a:normAutofit/>
-          </a:bodyPr>
-          <a:lstStyle/>
-          <a:p>
-            <a:pPr marL="0" indent="0">
-              <a:buNone/>
-            </a:pPr>
-            <a:r>
-              <a:rPr lang="en-US" sz="1400" dirty="0">
-                <a:solidFill>
-                  <a:srgbClr val="6B7280"/>
-                </a:solidFill>
-              </a:rPr>
-              <a:t>A push updates the EDS code bus. A Worker route update requires wrangler deploy.</a:t>
-            </a:r>
-            <a:endParaRPr lang="en-US" sz="1400" dirty="0"/>
-          </a:p>
-        </p:txBody>
-      </p:sp>
-      <p:pic>
-        <p:nvPicPr>
-          <p:cNvPr id="5" name="Image 0" descr="/mnt/data/firefly_variant_work/assets/deploy.png"/>
-          <p:cNvPicPr>
-            <a:picLocks noChangeAspect="1"/>
-          </p:cNvPicPr>
-          <p:nvPr/>
-        </p:nvPicPr>
-        <p:blipFill>
-          <a:blip r:embed="rId3"/>
-          <a:stretch>
-            <a:fillRect/>
-          </a:stretch>
-        </p:blipFill>
-        <p:spPr>
-          <a:xfrm>
-            <a:off x="2175634" y="1828800"/>
-            <a:ext cx="7846828" cy="1874520"/>
-          </a:xfrm>
-          <a:prstGeom prst="rect">
-            <a:avLst/>
-          </a:prstGeom>
-        </p:spPr>
-      </p:pic>
-      <p:sp>
-        <p:nvSpPr>
-          <p:cNvPr id="6" name="Shape 3"/>
-          <p:cNvSpPr/>
-          <p:nvPr/>
-        </p:nvSpPr>
-        <p:spPr>
-          <a:xfrm>
-            <a:off x="566928" y="3931920"/>
-            <a:ext cx="5321808" cy="1664208"/>
-          </a:xfrm>
-          <a:prstGeom prst="roundRect">
-            <a:avLst>
-              <a:gd name="adj" fmla="val 9890"/>
-            </a:avLst>
-          </a:prstGeom>
-          <a:solidFill>
-            <a:srgbClr val="FFFFFF"/>
-          </a:solidFill>
-          <a:ln w="12700">
-            <a:solidFill>
-              <a:srgbClr val="E5E7EB"/>
-            </a:solidFill>
-            <a:prstDash val="solid"/>
-          </a:ln>
-        </p:spPr>
-        <p:txBody>
-          <a:bodyPr/>
-          <a:lstStyle/>
-          <a:p>
-            <a:endParaRPr lang="en-US"/>
-          </a:p>
-        </p:txBody>
-      </p:sp>
-      <p:sp>
-        <p:nvSpPr>
-          <p:cNvPr id="7" name="Text 4"/>
-          <p:cNvSpPr/>
-          <p:nvPr/>
-        </p:nvSpPr>
-        <p:spPr>
-          <a:xfrm>
-            <a:off x="822960" y="4151376"/>
-            <a:ext cx="1005840" cy="201168"/>
-          </a:xfrm>
-          <a:prstGeom prst="rect">
-            <a:avLst/>
-          </a:prstGeom>
-          <a:noFill/>
-          <a:ln/>
-        </p:spPr>
-        <p:txBody>
-          <a:bodyPr wrap="square" lIns="0" tIns="0" rIns="0" bIns="0" rtlCol="0" anchor="ctr"/>
-          <a:lstStyle/>
-          <a:p>
-            <a:pPr marL="0" indent="0" algn="ctr">
-              <a:buNone/>
-            </a:pPr>
-            <a:r>
-              <a:rPr lang="en-US" sz="1000" b="1" dirty="0">
-                <a:solidFill>
-                  <a:srgbClr val="FFFFFF"/>
-                </a:solidFill>
-              </a:rPr>
-              <a:t>REGISTER</a:t>
-            </a:r>
-            <a:endParaRPr lang="en-US" sz="1000" dirty="0"/>
-          </a:p>
-        </p:txBody>
-      </p:sp>
-      <p:sp>
-        <p:nvSpPr>
-          <p:cNvPr id="8" name="Shape 5"/>
-          <p:cNvSpPr/>
-          <p:nvPr/>
-        </p:nvSpPr>
-        <p:spPr>
-          <a:xfrm>
-            <a:off x="786384" y="4105656"/>
-            <a:ext cx="1078992" cy="329184"/>
-          </a:xfrm>
-          <a:prstGeom prst="roundRect">
-            <a:avLst>
-              <a:gd name="adj" fmla="val 41667"/>
-            </a:avLst>
-          </a:prstGeom>
-          <a:solidFill>
-            <a:srgbClr val="111111"/>
-          </a:solidFill>
-          <a:ln w="12700">
-            <a:solidFill>
-              <a:srgbClr val="111111"/>
-            </a:solidFill>
-            <a:prstDash val="solid"/>
-          </a:ln>
-        </p:spPr>
-        <p:txBody>
-          <a:bodyPr/>
-          <a:lstStyle/>
-          <a:p>
-            <a:endParaRPr lang="en-US"/>
-          </a:p>
-        </p:txBody>
-      </p:sp>
-      <p:sp>
-        <p:nvSpPr>
-          <p:cNvPr id="9" name="Text 6"/>
-          <p:cNvSpPr/>
-          <p:nvPr/>
-        </p:nvSpPr>
-        <p:spPr>
-          <a:xfrm>
-            <a:off x="822960" y="4178808"/>
-            <a:ext cx="1005840" cy="146304"/>
-          </a:xfrm>
-          <a:prstGeom prst="rect">
-            <a:avLst/>
-          </a:prstGeom>
-          <a:noFill/>
-          <a:ln/>
-        </p:spPr>
-        <p:txBody>
-          <a:bodyPr wrap="square" lIns="0" tIns="0" rIns="0" bIns="0" rtlCol="0" anchor="ctr"/>
-          <a:lstStyle/>
-          <a:p>
-            <a:pPr marL="0" indent="0" algn="ctr">
-              <a:buNone/>
-            </a:pPr>
-            <a:r>
-              <a:rPr lang="en-US" sz="900" b="1" dirty="0">
-                <a:solidFill>
-                  <a:srgbClr val="FFFFFF"/>
-                </a:solidFill>
-              </a:rPr>
-              <a:t>REGISTER</a:t>
-            </a:r>
-            <a:endParaRPr lang="en-US" sz="900" dirty="0"/>
-          </a:p>
-        </p:txBody>
-      </p:sp>
-      <p:sp>
-        <p:nvSpPr>
-          <p:cNvPr id="10" name="Text 7"/>
-          <p:cNvSpPr/>
-          <p:nvPr/>
-        </p:nvSpPr>
-        <p:spPr>
-          <a:xfrm>
-            <a:off x="822960" y="4617720"/>
-            <a:ext cx="4526280" cy="749808"/>
-          </a:xfrm>
-          <a:prstGeom prst="rect">
-            <a:avLst/>
-          </a:prstGeom>
-          <a:noFill/>
-          <a:ln/>
-        </p:spPr>
-        <p:txBody>
-          <a:bodyPr wrap="square" lIns="0" tIns="0" rIns="0" bIns="0" rtlCol="0" anchor="ctr">
-            <a:normAutofit/>
-          </a:bodyPr>
-          <a:lstStyle/>
-          <a:p>
-            <a:pPr marL="0" indent="0">
-              <a:buNone/>
-            </a:pPr>
-            <a:r>
-              <a:rPr lang="en-US" sz="1300" dirty="0">
-                <a:solidFill>
-                  <a:srgbClr val="1F2937"/>
-                </a:solidFill>
-              </a:rPr>
-              <a:t>• Exact block id: product-variant</a:t>
-            </a:r>
-            <a:endParaRPr lang="en-US" sz="1300" dirty="0"/>
-          </a:p>
-          <a:p>
-            <a:pPr marL="0" indent="0">
-              <a:buNone/>
-            </a:pPr>
-            <a:r>
-              <a:rPr lang="en-US" sz="1300" dirty="0">
-                <a:solidFill>
-                  <a:srgbClr val="1F2937"/>
-                </a:solidFill>
-              </a:rPr>
-              <a:t>• Add id to each relevant section filter</a:t>
-            </a:r>
-            <a:endParaRPr lang="en-US" sz="1300" dirty="0"/>
-          </a:p>
-          <a:p>
-            <a:pPr marL="0" indent="0">
-              <a:buNone/>
-            </a:pPr>
-            <a:r>
-              <a:rPr lang="en-US" sz="1300" dirty="0">
-                <a:solidFill>
-                  <a:srgbClr val="1F2937"/>
-                </a:solidFill>
-              </a:rPr>
-              <a:t>• npm run build:json</a:t>
-            </a:r>
-            <a:endParaRPr lang="en-US" sz="1300" dirty="0"/>
-          </a:p>
-        </p:txBody>
-      </p:sp>
-      <p:sp>
-        <p:nvSpPr>
-          <p:cNvPr id="11" name="Shape 8"/>
-          <p:cNvSpPr/>
-          <p:nvPr/>
-        </p:nvSpPr>
-        <p:spPr>
-          <a:xfrm>
-            <a:off x="6163056" y="3931920"/>
-            <a:ext cx="5468112" cy="1664208"/>
-          </a:xfrm>
-          <a:prstGeom prst="roundRect">
-            <a:avLst>
-              <a:gd name="adj" fmla="val 9890"/>
-            </a:avLst>
-          </a:prstGeom>
-          <a:solidFill>
-            <a:srgbClr val="FFF8F7"/>
-          </a:solidFill>
-          <a:ln w="12700">
-            <a:solidFill>
-              <a:srgbClr val="FECACA"/>
-            </a:solidFill>
-            <a:prstDash val="solid"/>
-          </a:ln>
-        </p:spPr>
-        <p:txBody>
-          <a:bodyPr/>
-          <a:lstStyle/>
-          <a:p>
-            <a:endParaRPr lang="en-US"/>
-          </a:p>
-        </p:txBody>
-      </p:sp>
-      <p:sp>
-        <p:nvSpPr>
-          <p:cNvPr id="12" name="Shape 9"/>
-          <p:cNvSpPr/>
-          <p:nvPr/>
-        </p:nvSpPr>
-        <p:spPr>
-          <a:xfrm>
-            <a:off x="6400800" y="4105656"/>
-            <a:ext cx="914400" cy="329184"/>
-          </a:xfrm>
-          <a:prstGeom prst="roundRect">
-            <a:avLst>
-              <a:gd name="adj" fmla="val 41667"/>
-            </a:avLst>
-          </a:prstGeom>
-          <a:solidFill>
-            <a:srgbClr val="FA0F00"/>
-          </a:solidFill>
-          <a:ln w="12700">
-            <a:solidFill>
-              <a:srgbClr val="FA0F00"/>
-            </a:solidFill>
-            <a:prstDash val="solid"/>
-          </a:ln>
-        </p:spPr>
-        <p:txBody>
-          <a:bodyPr/>
-          <a:lstStyle/>
-          <a:p>
-            <a:endParaRPr lang="en-US"/>
-          </a:p>
-        </p:txBody>
-      </p:sp>
-      <p:sp>
-        <p:nvSpPr>
-          <p:cNvPr id="13" name="Text 10"/>
-          <p:cNvSpPr/>
-          <p:nvPr/>
-        </p:nvSpPr>
-        <p:spPr>
-          <a:xfrm>
-            <a:off x="6446520" y="4178808"/>
-            <a:ext cx="822960" cy="146304"/>
-          </a:xfrm>
-          <a:prstGeom prst="rect">
-            <a:avLst/>
-          </a:prstGeom>
-          <a:noFill/>
-          <a:ln/>
-        </p:spPr>
-        <p:txBody>
-          <a:bodyPr wrap="square" lIns="0" tIns="0" rIns="0" bIns="0" rtlCol="0" anchor="ctr"/>
-          <a:lstStyle/>
-          <a:p>
-            <a:pPr marL="0" indent="0" algn="ctr">
-              <a:buNone/>
-            </a:pPr>
-            <a:r>
-              <a:rPr lang="en-US" sz="900" b="1" dirty="0">
-                <a:solidFill>
-                  <a:srgbClr val="FFFFFF"/>
-                </a:solidFill>
-              </a:rPr>
-              <a:t>DEPLOY</a:t>
-            </a:r>
-            <a:endParaRPr lang="en-US" sz="900" dirty="0"/>
-          </a:p>
-        </p:txBody>
-      </p:sp>
-      <p:sp>
-        <p:nvSpPr>
-          <p:cNvPr id="14" name="Text 11"/>
-          <p:cNvSpPr/>
-          <p:nvPr/>
-        </p:nvSpPr>
-        <p:spPr>
-          <a:xfrm>
-            <a:off x="6400800" y="4617720"/>
-            <a:ext cx="4663440" cy="749808"/>
-          </a:xfrm>
-          <a:prstGeom prst="rect">
-            <a:avLst/>
-          </a:prstGeom>
-          <a:noFill/>
-          <a:ln/>
-        </p:spPr>
-        <p:txBody>
-          <a:bodyPr wrap="square" lIns="0" tIns="0" rIns="0" bIns="0" rtlCol="0" anchor="ctr">
-            <a:normAutofit/>
-          </a:bodyPr>
-          <a:lstStyle/>
-          <a:p>
-            <a:pPr marL="0" indent="0">
-              <a:buNone/>
-            </a:pPr>
-            <a:r>
-              <a:rPr lang="en-US" sz="1300" dirty="0">
-                <a:solidFill>
-                  <a:srgbClr val="1F2937"/>
-                </a:solidFill>
-              </a:rPr>
-              <a:t>• git push → EDS code bus</a:t>
-            </a:r>
-            <a:endParaRPr lang="en-US" sz="1300" dirty="0"/>
-          </a:p>
-          <a:p>
-            <a:pPr marL="0" indent="0">
-              <a:buNone/>
-            </a:pPr>
-            <a:r>
-              <a:rPr lang="en-US" sz="1300" dirty="0">
-                <a:solidFill>
-                  <a:srgbClr val="1F2937"/>
-                </a:solidFill>
-              </a:rPr>
-              <a:t>• npm run deploy:edge → Cloudflare Worker</a:t>
-            </a:r>
-            <a:endParaRPr lang="en-US" sz="1300" dirty="0"/>
-          </a:p>
-          <a:p>
-            <a:pPr marL="0" indent="0">
-              <a:buNone/>
-            </a:pPr>
-            <a:r>
-              <a:rPr lang="en-US" sz="1300" dirty="0">
-                <a:solidFill>
-                  <a:srgbClr val="1F2937"/>
-                </a:solidFill>
-              </a:rPr>
-              <a:t>• curl Worker route before UE</a:t>
-            </a:r>
-            <a:endParaRPr lang="en-US" sz="1300" dirty="0"/>
-          </a:p>
-        </p:txBody>
-      </p:sp>
-      <p:sp>
-        <p:nvSpPr>
-          <p:cNvPr id="25" name="Slide Number Placeholder 0"/>
-          <p:cNvSpPr>
-            <a:spLocks noGrp="1"/>
-          </p:cNvSpPr>
-          <p:nvPr>
-            <p:ph type="sldNum" sz="quarter" idx="4294967295"/>
-          </p:nvPr>
-        </p:nvSpPr>
-        <p:spPr>
-          <a:xfrm>
-            <a:off x="11832336" y="6409944"/>
-            <a:ext cx="800000" cy="300000"/>
-          </a:xfrm>
-          <a:prstGeom prst="rect">
-            <a:avLst/>
-          </a:prstGeom>
-          <a:extLst>
-            <a:ext uri="{C572A759-6A51-4108-AA02-DFA0A04FC94B}">
-              <ma14:wrappingTextBoxFlag xmlns:ma14="http://schemas.microsoft.com/office/mac/drawingml/2011/main" xmlns="" val="0"/>
+              <ma14:wrappingTextBoxFlag xmlns="" xmlns:ma14="http://schemas.microsoft.com/office/mac/drawingml/2011/main" val="0"/>
             </a:ext>
           </a:extLst>
         </p:spPr>
